--- a/dist/초3/과학/생물/초3_과학_생물_03_식물의한살이.pptx
+++ b/dist/초3/과학/생물/초3_과학_생물_03_식물의한살이.pptx
@@ -121,13 +121,13 @@
   <p:extLst>
     <p:ext uri="{521415D9-36F7-43E2-AB2F-B90AF26B5E84}">
       <p14:sectionLst xmlns:p14="http://schemas.microsoft.com/office/powerpoint/2010/main">
-        <p14:section name="도입" id="{5c5b3e80-173b-ed8d-24da-b524059209fa}">
+        <p14:section name="도입" id="{dd72221b-7ce5-5ef4-8532-4c4243809776}">
           <p14:sldIdLst>
             <p14:sldId id="256"/>
             <p14:sldId id="257"/>
           </p14:sldIdLst>
         </p14:section>
-        <p14:section name="개념" id="{a7a86349-e7a8-8311-f2b3-0e47266c5910}">
+        <p14:section name="개념" id="{5aa0701d-7137-5f0b-4135-a5f881ce6f35}">
           <p14:sldIdLst>
             <p14:sldId id="258"/>
             <p14:sldId id="259"/>
@@ -137,25 +137,25 @@
             <p14:sldId id="263"/>
           </p14:sldIdLst>
         </p14:section>
-        <p14:section name="연습" id="{cf175480-bef6-42bc-ee33-d8f55c238b3e}">
+        <p14:section name="연습" id="{b2894478-0f14-a568-8d66-a96b8057d975}">
           <p14:sldIdLst>
             <p14:sldId id="264"/>
             <p14:sldId id="265"/>
             <p14:sldId id="266"/>
           </p14:sldIdLst>
         </p14:section>
-        <p14:section name="확인" id="{4bd57712-8702-ac24-0f29-20d11e61f825}">
+        <p14:section name="확인" id="{c27db9db-2848-8367-5ea3-819222f18c43}">
           <p14:sldIdLst>
             <p14:sldId id="267"/>
             <p14:sldId id="268"/>
           </p14:sldIdLst>
         </p14:section>
-        <p14:section name="정리" id="{6693a660-573d-d6d6-be61-70c4de23691f}">
+        <p14:section name="정리" id="{d7ce2b75-b916-92ac-9a82-5d7ab7f936b6}">
           <p14:sldIdLst>
             <p14:sldId id="269"/>
           </p14:sldIdLst>
         </p14:section>
-        <p14:section name="보충" id="{875443f8-f98d-4572-f51b-ac7c14f76af8}">
+        <p14:section name="보충" id="{9002cf3e-a032-e24d-c4c0-b20ef62787bd}">
           <p14:sldIdLst>
             <p14:sldId id="270"/>
           </p14:sldIdLst>
